--- a/backend/templates/certificate-template-male.pptx
+++ b/backend/templates/certificate-template-male.pptx
@@ -54,11 +54,34 @@
 <pc:chgInfo xmlns:a="http://schemas.openxmlformats.org/drawingml/2006/main" xmlns:r="http://schemas.openxmlformats.org/officeDocument/2006/relationships" xmlns:ac="http://schemas.microsoft.com/office/drawing/2013/main/command" xmlns:pc="http://schemas.microsoft.com/office/powerpoint/2013/main/command">
   <pc:docChgLst>
     <pc:chgData name="Sultan" userId="596bfde2-47e4-4d36-8f0a-78d31f84a794" providerId="ADAL" clId="{1076C667-93C1-4541-A912-C76B4913C881}"/>
-    <pc:docChg chg="delSld delSection modSection">
-      <pc:chgData name="Sultan" userId="596bfde2-47e4-4d36-8f0a-78d31f84a794" providerId="ADAL" clId="{1076C667-93C1-4541-A912-C76B4913C881}" dt="2026-07-29T09:05:39.181" v="1" actId="17851"/>
+    <pc:docChg chg="delSld modSld delSection modSection">
+      <pc:chgData name="Sultan" userId="596bfde2-47e4-4d36-8f0a-78d31f84a794" providerId="ADAL" clId="{1076C667-93C1-4541-A912-C76B4913C881}" dt="2026-07-29T12:08:41.369" v="2" actId="22"/>
       <pc:docMkLst>
         <pc:docMk/>
       </pc:docMkLst>
+      <pc:sldChg chg="addSp mod">
+        <pc:chgData name="Sultan" userId="596bfde2-47e4-4d36-8f0a-78d31f84a794" providerId="ADAL" clId="{1076C667-93C1-4541-A912-C76B4913C881}" dt="2026-07-29T12:08:41.369" v="2" actId="22"/>
+        <pc:sldMkLst>
+          <pc:docMk/>
+          <pc:sldMk cId="0" sldId="256"/>
+        </pc:sldMkLst>
+        <pc:spChg chg="add">
+          <ac:chgData name="Sultan" userId="596bfde2-47e4-4d36-8f0a-78d31f84a794" providerId="ADAL" clId="{1076C667-93C1-4541-A912-C76B4913C881}" dt="2026-07-29T12:08:41.369" v="2" actId="22"/>
+          <ac:spMkLst>
+            <pc:docMk/>
+            <pc:sldMk cId="0" sldId="256"/>
+            <ac:spMk id="3" creationId="{493CF697-A7BE-AC75-56A9-0DDE7A53BE7B}"/>
+          </ac:spMkLst>
+        </pc:spChg>
+        <pc:picChg chg="add">
+          <ac:chgData name="Sultan" userId="596bfde2-47e4-4d36-8f0a-78d31f84a794" providerId="ADAL" clId="{1076C667-93C1-4541-A912-C76B4913C881}" dt="2026-07-29T12:08:41.369" v="2" actId="22"/>
+          <ac:picMkLst>
+            <pc:docMk/>
+            <pc:sldMk cId="0" sldId="256"/>
+            <ac:picMk id="5" creationId="{72D5900F-E0FF-1CDD-B4CD-D8BDEBEEAB0B}"/>
+          </ac:picMkLst>
+        </pc:picChg>
+      </pc:sldChg>
       <pc:sldChg chg="del">
         <pc:chgData name="Sultan" userId="596bfde2-47e4-4d36-8f0a-78d31f84a794" providerId="ADAL" clId="{1076C667-93C1-4541-A912-C76B4913C881}" dt="2026-07-29T09:05:35.733" v="0" actId="47"/>
         <pc:sldMkLst>
@@ -1806,6 +1829,85 @@
           </a:p>
         </p:txBody>
       </p:sp>
+      <p:sp>
+        <p:nvSpPr>
+          <p:cNvPr id="3" name="TextBox 2">
+            <a:extLst>
+              <a:ext uri="{FF2B5EF4-FFF2-40B4-BE49-F238E27FC236}">
+                <a16:creationId xmlns:a16="http://schemas.microsoft.com/office/drawing/2014/main" id="{493CF697-A7BE-AC75-56A9-0DDE7A53BE7B}"/>
+              </a:ext>
+            </a:extLst>
+          </p:cNvPr>
+          <p:cNvSpPr txBox="1"/>
+          <p:nvPr/>
+        </p:nvSpPr>
+        <p:spPr>
+          <a:xfrm>
+            <a:off x="1119822" y="6010976"/>
+            <a:ext cx="3581400" cy="307777"/>
+          </a:xfrm>
+          <a:prstGeom prst="rect">
+            <a:avLst/>
+          </a:prstGeom>
+          <a:noFill/>
+        </p:spPr>
+        <p:txBody>
+          <a:bodyPr wrap="square" rtlCol="0">
+            <a:spAutoFit/>
+          </a:bodyPr>
+          <a:lstStyle/>
+          <a:p>
+            <a:pPr algn="ctr"/>
+            <a:r>
+              <a:rPr lang="ar-SA" sz="1400" b="1" dirty="0">
+                <a:solidFill>
+                  <a:srgbClr val="B41E34"/>
+                </a:solidFill>
+                <a:latin typeface="Effra" panose="020B0603020203020204" pitchFamily="34" charset="0"/>
+                <a:cs typeface="Effra" panose="020B0603020203020204" pitchFamily="34" charset="0"/>
+              </a:rPr>
+              <a:t>اسم الـــمــــــــــــــدرب\ة</a:t>
+            </a:r>
+            <a:endParaRPr lang="en-US" sz="1400" b="1" dirty="0">
+              <a:solidFill>
+                <a:srgbClr val="B41E34"/>
+              </a:solidFill>
+              <a:latin typeface="Effra" panose="020B0603020203020204" pitchFamily="34" charset="0"/>
+              <a:cs typeface="Effra" panose="020B0603020203020204" pitchFamily="34" charset="0"/>
+            </a:endParaRPr>
+          </a:p>
+        </p:txBody>
+      </p:sp>
+      <p:pic>
+        <p:nvPicPr>
+          <p:cNvPr id="5" name="Picture 4">
+            <a:extLst>
+              <a:ext uri="{FF2B5EF4-FFF2-40B4-BE49-F238E27FC236}">
+                <a16:creationId xmlns:a16="http://schemas.microsoft.com/office/drawing/2014/main" id="{72D5900F-E0FF-1CDD-B4CD-D8BDEBEEAB0B}"/>
+              </a:ext>
+            </a:extLst>
+          </p:cNvPr>
+          <p:cNvPicPr>
+            <a:picLocks noChangeAspect="1"/>
+          </p:cNvPicPr>
+          <p:nvPr/>
+        </p:nvPicPr>
+        <p:blipFill>
+          <a:blip r:embed="rId3"/>
+          <a:stretch>
+            <a:fillRect/>
+          </a:stretch>
+        </p:blipFill>
+        <p:spPr>
+          <a:xfrm>
+            <a:off x="6718300" y="5922771"/>
+            <a:ext cx="1752600" cy="673100"/>
+          </a:xfrm>
+          <a:prstGeom prst="rect">
+            <a:avLst/>
+          </a:prstGeom>
+        </p:spPr>
+      </p:pic>
     </p:spTree>
   </p:cSld>
   <p:clrMapOvr>
